--- a/atelier/atelier-s06-about-me.pptx
+++ b/atelier/atelier-s06-about-me.pptx
@@ -3316,7 +3316,7 @@
         </p:nvSpPr>
         <p:spPr>
           <a:xfrm>
-            <a:off x="762000" y="10367962"/>
+            <a:off x="762000" y="10223897"/>
             <a:ext cx="8763000" cy="9525"/>
           </a:xfrm>
           <a:prstGeom prst="rect">
@@ -3360,7 +3360,7 @@
         </p:nvSpPr>
         <p:spPr>
           <a:xfrm>
-            <a:off x="762000" y="11096625"/>
+            <a:off x="762000" y="10952559"/>
             <a:ext cx="8763000" cy="9525"/>
           </a:xfrm>
           <a:prstGeom prst="rect">
@@ -3404,7 +3404,7 @@
         </p:nvSpPr>
         <p:spPr>
           <a:xfrm>
-            <a:off x="762000" y="11825288"/>
+            <a:off x="762000" y="11681222"/>
             <a:ext cx="8763000" cy="9525"/>
           </a:xfrm>
           <a:prstGeom prst="rect">
@@ -3778,7 +3778,7 @@
         <p:spPr>
           <a:xfrm>
             <a:off x="762000" y="8401050"/>
-            <a:ext cx="14401800" cy="704850"/>
+            <a:ext cx="14401800" cy="560784"/>
           </a:xfrm>
           <a:prstGeom prst="rect">
             <a:avLst/>
@@ -3789,7 +3789,11 @@
           <a:bodyPr wrap="none" anchor="t" lIns="0" rIns="0" tIns="0" bIns="0"/>
           <a:lstStyle/>
           <a:p>
-            <a:pPr algn="l"/>
+            <a:pPr algn="l">
+              <a:lnSpc>
+                <a:spcPct val="92000"/>
+              </a:lnSpc>
+            </a:pPr>
             <a:r>
               <a:rPr sz="4800" i="1" b="0">
                 <a:solidFill>
@@ -3812,7 +3816,7 @@
         </p:nvSpPr>
         <p:spPr>
           <a:xfrm>
-            <a:off x="762000" y="9220200"/>
+            <a:off x="762000" y="9076134"/>
             <a:ext cx="14401800" cy="104775"/>
           </a:xfrm>
           <a:prstGeom prst="rect">
@@ -3847,7 +3851,7 @@
         </p:nvSpPr>
         <p:spPr>
           <a:xfrm>
-            <a:off x="762000" y="9801225"/>
+            <a:off x="762000" y="9657159"/>
             <a:ext cx="716280" cy="230386"/>
           </a:xfrm>
           <a:prstGeom prst="rect">
@@ -3886,7 +3890,7 @@
         </p:nvSpPr>
         <p:spPr>
           <a:xfrm>
-            <a:off x="1143000" y="9801225"/>
+            <a:off x="1143000" y="9657159"/>
             <a:ext cx="3145155" cy="200025"/>
           </a:xfrm>
           <a:prstGeom prst="rect">
@@ -3921,7 +3925,7 @@
         </p:nvSpPr>
         <p:spPr>
           <a:xfrm>
-            <a:off x="1143000" y="10029825"/>
+            <a:off x="1143000" y="9885759"/>
             <a:ext cx="3145155" cy="185738"/>
           </a:xfrm>
           <a:prstGeom prst="rect">
@@ -3960,7 +3964,7 @@
         </p:nvSpPr>
         <p:spPr>
           <a:xfrm>
-            <a:off x="762000" y="10529888"/>
+            <a:off x="762000" y="10385822"/>
             <a:ext cx="716280" cy="230386"/>
           </a:xfrm>
           <a:prstGeom prst="rect">
@@ -3999,7 +4003,7 @@
         </p:nvSpPr>
         <p:spPr>
           <a:xfrm>
-            <a:off x="1143000" y="10529888"/>
+            <a:off x="1143000" y="10385822"/>
             <a:ext cx="3002042" cy="200025"/>
           </a:xfrm>
           <a:prstGeom prst="rect">
@@ -4034,7 +4038,7 @@
         </p:nvSpPr>
         <p:spPr>
           <a:xfrm>
-            <a:off x="1143000" y="10758488"/>
+            <a:off x="1143000" y="10614422"/>
             <a:ext cx="3002042" cy="185738"/>
           </a:xfrm>
           <a:prstGeom prst="rect">
@@ -4073,7 +4077,7 @@
         </p:nvSpPr>
         <p:spPr>
           <a:xfrm>
-            <a:off x="762000" y="11258550"/>
+            <a:off x="762000" y="11114484"/>
             <a:ext cx="716280" cy="230386"/>
           </a:xfrm>
           <a:prstGeom prst="rect">
@@ -4112,7 +4116,7 @@
         </p:nvSpPr>
         <p:spPr>
           <a:xfrm>
-            <a:off x="1143000" y="11258550"/>
+            <a:off x="1143000" y="11114484"/>
             <a:ext cx="3332321" cy="200025"/>
           </a:xfrm>
           <a:prstGeom prst="rect">
@@ -4147,7 +4151,7 @@
         </p:nvSpPr>
         <p:spPr>
           <a:xfrm>
-            <a:off x="1143000" y="11487150"/>
+            <a:off x="1143000" y="11343084"/>
             <a:ext cx="3332321" cy="185738"/>
           </a:xfrm>
           <a:prstGeom prst="rect">

--- a/atelier/atelier-s06-about-me.pptx
+++ b/atelier/atelier-s06-about-me.pptx
@@ -3141,7 +3141,7 @@
         <p:spPr>
           <a:xfrm>
             <a:off x="762000" y="762000"/>
-            <a:ext cx="457200" cy="9525"/>
+            <a:ext cx="552450" cy="9525"/>
           </a:xfrm>
           <a:prstGeom prst="rect">
             <a:avLst/>
@@ -3184,8 +3184,8 @@
         </p:nvSpPr>
         <p:spPr>
           <a:xfrm>
-            <a:off x="762000" y="1209675"/>
-            <a:ext cx="457200" cy="9525"/>
+            <a:off x="762000" y="1304925"/>
+            <a:ext cx="552450" cy="9525"/>
           </a:xfrm>
           <a:prstGeom prst="rect">
             <a:avLst/>
@@ -3229,7 +3229,7 @@
         <p:spPr>
           <a:xfrm>
             <a:off x="762000" y="762000"/>
-            <a:ext cx="9525" cy="457200"/>
+            <a:ext cx="9525" cy="552450"/>
           </a:xfrm>
           <a:prstGeom prst="rect">
             <a:avLst/>
@@ -3272,8 +3272,8 @@
         </p:nvSpPr>
         <p:spPr>
           <a:xfrm>
-            <a:off x="1209675" y="762000"/>
-            <a:ext cx="9525" cy="457200"/>
+            <a:off x="1304925" y="762000"/>
+            <a:ext cx="9525" cy="552450"/>
           </a:xfrm>
           <a:prstGeom prst="rect">
             <a:avLst/>
@@ -3316,7 +3316,7 @@
         </p:nvSpPr>
         <p:spPr>
           <a:xfrm>
-            <a:off x="762000" y="10223897"/>
+            <a:off x="762000" y="11754743"/>
             <a:ext cx="8763000" cy="9525"/>
           </a:xfrm>
           <a:prstGeom prst="rect">
@@ -3360,7 +3360,7 @@
         </p:nvSpPr>
         <p:spPr>
           <a:xfrm>
-            <a:off x="762000" y="10952559"/>
+            <a:off x="762000" y="12969180"/>
             <a:ext cx="8763000" cy="9525"/>
           </a:xfrm>
           <a:prstGeom prst="rect">
@@ -3404,7 +3404,7 @@
         </p:nvSpPr>
         <p:spPr>
           <a:xfrm>
-            <a:off x="762000" y="11681222"/>
+            <a:off x="762000" y="14183618"/>
             <a:ext cx="8763000" cy="9525"/>
           </a:xfrm>
           <a:prstGeom prst="rect">
@@ -3448,7 +3448,7 @@
         </p:nvSpPr>
         <p:spPr>
           <a:xfrm>
-            <a:off x="762000" y="15735300"/>
+            <a:off x="762000" y="15782925"/>
             <a:ext cx="8763000" cy="9525"/>
           </a:xfrm>
           <a:prstGeom prst="rect">
@@ -3492,7 +3492,7 @@
         </p:nvSpPr>
         <p:spPr>
           <a:xfrm>
-            <a:off x="762000" y="16373475"/>
+            <a:off x="762000" y="16659225"/>
             <a:ext cx="8763000" cy="9525"/>
           </a:xfrm>
           <a:prstGeom prst="rect">
@@ -3536,8 +3536,8 @@
         </p:nvSpPr>
         <p:spPr>
           <a:xfrm>
-            <a:off x="762000" y="15735300"/>
-            <a:ext cx="9525" cy="647700"/>
+            <a:off x="762000" y="15782925"/>
+            <a:ext cx="9525" cy="885825"/>
           </a:xfrm>
           <a:prstGeom prst="rect">
             <a:avLst/>
@@ -3580,8 +3580,8 @@
         </p:nvSpPr>
         <p:spPr>
           <a:xfrm>
-            <a:off x="9515475" y="15735300"/>
-            <a:ext cx="9525" cy="647700"/>
+            <a:off x="9515475" y="15782925"/>
+            <a:ext cx="9525" cy="885825"/>
           </a:xfrm>
           <a:prstGeom prst="rect">
             <a:avLst/>
@@ -3624,8 +3624,8 @@
         </p:nvSpPr>
         <p:spPr>
           <a:xfrm>
-            <a:off x="1024416" y="16012004"/>
-            <a:ext cx="94293" cy="94292"/>
+            <a:off x="1077621" y="16165220"/>
+            <a:ext cx="121233" cy="121234"/>
           </a:xfrm>
           <a:prstGeom prst="rect">
             <a:avLst/>
@@ -3668,8 +3668,8 @@
         </p:nvSpPr>
         <p:spPr>
           <a:xfrm>
-            <a:off x="862608" y="909638"/>
-            <a:ext cx="790575" cy="161925"/>
+            <a:off x="880170" y="938212"/>
+            <a:ext cx="886778" cy="200025"/>
           </a:xfrm>
           <a:prstGeom prst="rect">
             <a:avLst/>
@@ -3686,7 +3686,7 @@
               </a:lnSpc>
             </a:pPr>
             <a:r>
-              <a:rPr sz="1275" i="0" b="1" spc="51">
+              <a:rPr sz="1575" i="0" b="1" spc="63">
                 <a:solidFill>
                   <a:srgbClr val="1A1714"/>
                 </a:solidFill>
@@ -3707,8 +3707,8 @@
         </p:nvSpPr>
         <p:spPr>
           <a:xfrm>
-            <a:off x="8394055" y="938212"/>
-            <a:ext cx="2190512" cy="104775"/>
+            <a:off x="7782818" y="952500"/>
+            <a:ext cx="3168491" cy="171450"/>
           </a:xfrm>
           <a:prstGeom prst="rect">
             <a:avLst/>
@@ -3721,7 +3721,7 @@
           <a:p>
             <a:pPr algn="l"/>
             <a:r>
-              <a:rPr sz="750" i="0" b="0" spc="105">
+              <a:rPr sz="1125" i="0" b="0" spc="180">
                 <a:solidFill>
                   <a:srgbClr val="8A7E6F"/>
                 </a:solidFill>
@@ -3742,8 +3742,8 @@
         </p:nvSpPr>
         <p:spPr>
           <a:xfrm>
-            <a:off x="762000" y="8153400"/>
-            <a:ext cx="14401800" cy="133350"/>
+            <a:off x="762000" y="8801100"/>
+            <a:ext cx="14401800" cy="228600"/>
           </a:xfrm>
           <a:prstGeom prst="rect">
             <a:avLst/>
@@ -3756,7 +3756,7 @@
           <a:p>
             <a:pPr algn="l"/>
             <a:r>
-              <a:rPr sz="900" i="0" b="1" spc="306">
+              <a:rPr sz="1575" i="0" b="1" spc="472">
                 <a:solidFill>
                   <a:srgbClr val="BC5B36"/>
                 </a:solidFill>
@@ -3777,8 +3777,8 @@
         </p:nvSpPr>
         <p:spPr>
           <a:xfrm>
-            <a:off x="762000" y="8401050"/>
-            <a:ext cx="14401800" cy="560784"/>
+            <a:off x="762000" y="9163050"/>
+            <a:ext cx="14401800" cy="700980"/>
           </a:xfrm>
           <a:prstGeom prst="rect">
             <a:avLst/>
@@ -3795,7 +3795,7 @@
               </a:lnSpc>
             </a:pPr>
             <a:r>
-              <a:rPr sz="4800" i="1" b="0">
+              <a:rPr sz="6000" i="1" b="0">
                 <a:solidFill>
                   <a:srgbClr val="1A1714"/>
                 </a:solidFill>
@@ -3816,8 +3816,8 @@
         </p:nvSpPr>
         <p:spPr>
           <a:xfrm>
-            <a:off x="762000" y="9076134"/>
-            <a:ext cx="14401800" cy="104775"/>
+            <a:off x="762000" y="9997380"/>
+            <a:ext cx="14401800" cy="171450"/>
           </a:xfrm>
           <a:prstGeom prst="rect">
             <a:avLst/>
@@ -3830,13 +3830,13 @@
           <a:p>
             <a:pPr algn="l"/>
             <a:r>
-              <a:rPr sz="750" i="0" b="0" spc="75">
+              <a:rPr sz="1200" i="0" b="1" spc="240">
                 <a:solidFill>
                   <a:srgbClr val="8A7E6F"/>
                 </a:solidFill>
-                <a:latin typeface="Space Mono"/>
-                <a:ea typeface="Space Mono"/>
-                <a:cs typeface="Space Mono"/>
+                <a:latin typeface="Archivo"/>
+                <a:ea typeface="Archivo"/>
+                <a:cs typeface="Archivo"/>
               </a:rPr>
               <a:t>PRINCIPAL DESIGNER</a:t>
             </a:r>
@@ -3851,8 +3851,8 @@
         </p:nvSpPr>
         <p:spPr>
           <a:xfrm>
-            <a:off x="762000" y="9657159"/>
-            <a:ext cx="716280" cy="230386"/>
+            <a:off x="762000" y="10797480"/>
+            <a:ext cx="960120" cy="398115"/>
           </a:xfrm>
           <a:prstGeom prst="rect">
             <a:avLst/>
@@ -3869,7 +3869,7 @@
               </a:lnSpc>
             </a:pPr>
             <a:r>
-              <a:rPr sz="1650" i="1" b="0">
+              <a:rPr sz="2850" i="1" b="0">
                 <a:solidFill>
                   <a:srgbClr val="BC5B36"/>
                 </a:solidFill>
@@ -3890,8 +3890,8 @@
         </p:nvSpPr>
         <p:spPr>
           <a:xfrm>
-            <a:off x="1143000" y="9657159"/>
-            <a:ext cx="3145155" cy="200025"/>
+            <a:off x="1295400" y="10797480"/>
+            <a:ext cx="4846320" cy="352425"/>
           </a:xfrm>
           <a:prstGeom prst="rect">
             <a:avLst/>
@@ -3904,7 +3904,7 @@
           <a:p>
             <a:pPr algn="l"/>
             <a:r>
-              <a:rPr sz="1350" i="0" b="1">
+              <a:rPr sz="2400" i="0" b="1">
                 <a:solidFill>
                   <a:srgbClr val="1A1714"/>
                 </a:solidFill>
@@ -3925,8 +3925,8 @@
         </p:nvSpPr>
         <p:spPr>
           <a:xfrm>
-            <a:off x="1143000" y="9885759"/>
-            <a:ext cx="3145155" cy="185738"/>
+            <a:off x="1295400" y="11207055"/>
+            <a:ext cx="4846320" cy="300038"/>
           </a:xfrm>
           <a:prstGeom prst="rect">
             <a:avLst/>
@@ -3943,7 +3943,7 @@
               </a:lnSpc>
             </a:pPr>
             <a:r>
-              <a:rPr sz="975" i="0" b="0">
+              <a:rPr sz="1575" i="0" b="0">
                 <a:solidFill>
                   <a:srgbClr val="8A7E6F"/>
                 </a:solidFill>
@@ -3964,8 +3964,8 @@
         </p:nvSpPr>
         <p:spPr>
           <a:xfrm>
-            <a:off x="762000" y="10385822"/>
-            <a:ext cx="716280" cy="230386"/>
+            <a:off x="762000" y="12011918"/>
+            <a:ext cx="960120" cy="398115"/>
           </a:xfrm>
           <a:prstGeom prst="rect">
             <a:avLst/>
@@ -3982,7 +3982,7 @@
               </a:lnSpc>
             </a:pPr>
             <a:r>
-              <a:rPr sz="1650" i="1" b="0">
+              <a:rPr sz="2850" i="1" b="0">
                 <a:solidFill>
                   <a:srgbClr val="BC5B36"/>
                 </a:solidFill>
@@ -4003,8 +4003,8 @@
         </p:nvSpPr>
         <p:spPr>
           <a:xfrm>
-            <a:off x="1143000" y="10385822"/>
-            <a:ext cx="3002042" cy="200025"/>
+            <a:off x="1295400" y="12011918"/>
+            <a:ext cx="4614862" cy="352425"/>
           </a:xfrm>
           <a:prstGeom prst="rect">
             <a:avLst/>
@@ -4017,7 +4017,7 @@
           <a:p>
             <a:pPr algn="l"/>
             <a:r>
-              <a:rPr sz="1350" i="0" b="1">
+              <a:rPr sz="2400" i="0" b="1">
                 <a:solidFill>
                   <a:srgbClr val="1A1714"/>
                 </a:solidFill>
@@ -4038,8 +4038,8 @@
         </p:nvSpPr>
         <p:spPr>
           <a:xfrm>
-            <a:off x="1143000" y="10614422"/>
-            <a:ext cx="3002042" cy="185738"/>
+            <a:off x="1295400" y="12421493"/>
+            <a:ext cx="4614862" cy="300038"/>
           </a:xfrm>
           <a:prstGeom prst="rect">
             <a:avLst/>
@@ -4056,7 +4056,7 @@
               </a:lnSpc>
             </a:pPr>
             <a:r>
-              <a:rPr sz="975" i="0" b="0">
+              <a:rPr sz="1575" i="0" b="0">
                 <a:solidFill>
                   <a:srgbClr val="8A7E6F"/>
                 </a:solidFill>
@@ -4077,8 +4077,8 @@
         </p:nvSpPr>
         <p:spPr>
           <a:xfrm>
-            <a:off x="762000" y="11114484"/>
-            <a:ext cx="716280" cy="230386"/>
+            <a:off x="762000" y="13226355"/>
+            <a:ext cx="960120" cy="398115"/>
           </a:xfrm>
           <a:prstGeom prst="rect">
             <a:avLst/>
@@ -4095,7 +4095,7 @@
               </a:lnSpc>
             </a:pPr>
             <a:r>
-              <a:rPr sz="1650" i="1" b="0">
+              <a:rPr sz="2850" i="1" b="0">
                 <a:solidFill>
                   <a:srgbClr val="BC5B36"/>
                 </a:solidFill>
@@ -4116,8 +4116,8 @@
         </p:nvSpPr>
         <p:spPr>
           <a:xfrm>
-            <a:off x="1143000" y="11114484"/>
-            <a:ext cx="3332321" cy="200025"/>
+            <a:off x="1295400" y="13226355"/>
+            <a:ext cx="5148501" cy="352425"/>
           </a:xfrm>
           <a:prstGeom prst="rect">
             <a:avLst/>
@@ -4130,7 +4130,7 @@
           <a:p>
             <a:pPr algn="l"/>
             <a:r>
-              <a:rPr sz="1350" i="0" b="1">
+              <a:rPr sz="2400" i="0" b="1">
                 <a:solidFill>
                   <a:srgbClr val="1A1714"/>
                 </a:solidFill>
@@ -4151,8 +4151,8 @@
         </p:nvSpPr>
         <p:spPr>
           <a:xfrm>
-            <a:off x="1143000" y="11343084"/>
-            <a:ext cx="3332321" cy="185738"/>
+            <a:off x="1295400" y="13635930"/>
+            <a:ext cx="5148501" cy="300038"/>
           </a:xfrm>
           <a:prstGeom prst="rect">
             <a:avLst/>
@@ -4169,7 +4169,7 @@
               </a:lnSpc>
             </a:pPr>
             <a:r>
-              <a:rPr sz="975" i="0" b="0">
+              <a:rPr sz="1575" i="0" b="0">
                 <a:solidFill>
                   <a:srgbClr val="8A7E6F"/>
                 </a:solidFill>
@@ -4190,8 +4190,8 @@
         </p:nvSpPr>
         <p:spPr>
           <a:xfrm>
-            <a:off x="1238250" y="15978188"/>
-            <a:ext cx="3078242" cy="161925"/>
+            <a:off x="1333500" y="16097250"/>
+            <a:ext cx="4411504" cy="257175"/>
           </a:xfrm>
           <a:prstGeom prst="rect">
             <a:avLst/>
@@ -4204,7 +4204,7 @@
           <a:p>
             <a:pPr algn="l"/>
             <a:r>
-              <a:rPr sz="1125" i="0" b="1" spc="135">
+              <a:rPr sz="1725" i="0" b="1" spc="172">
                 <a:solidFill>
                   <a:srgbClr val="1A1714"/>
                 </a:solidFill>
@@ -4225,8 +4225,8 @@
         </p:nvSpPr>
         <p:spPr>
           <a:xfrm>
-            <a:off x="9105900" y="15954375"/>
-            <a:ext cx="609600" cy="209550"/>
+            <a:off x="8982075" y="16078200"/>
+            <a:ext cx="716280" cy="295275"/>
           </a:xfrm>
           <a:prstGeom prst="rect">
             <a:avLst/>
@@ -4239,7 +4239,7 @@
           <a:p>
             <a:pPr algn="l"/>
             <a:r>
-              <a:rPr sz="1350" i="0" b="0">
+              <a:rPr sz="1950" i="0" b="0">
                 <a:solidFill>
                   <a:srgbClr val="BC5B36"/>
                 </a:solidFill>
@@ -4260,8 +4260,8 @@
         </p:nvSpPr>
         <p:spPr>
           <a:xfrm>
-            <a:off x="2801585" y="17297400"/>
-            <a:ext cx="4683681" cy="123825"/>
+            <a:off x="1823799" y="17192625"/>
+            <a:ext cx="6639401" cy="180975"/>
           </a:xfrm>
           <a:prstGeom prst="rect">
             <a:avLst/>
@@ -4274,7 +4274,7 @@
           <a:p>
             <a:pPr algn="ctr"/>
             <a:r>
-              <a:rPr sz="825" i="0" b="0" spc="165">
+              <a:rPr sz="1200" i="0" b="0" spc="240">
                 <a:solidFill>
                   <a:srgbClr val="8A7E6F"/>
                 </a:solidFill>
@@ -4303,8 +4303,8 @@
         </p:blipFill>
         <p:spPr>
           <a:xfrm>
-            <a:off x="762000" y="2476500"/>
-            <a:ext cx="8763000" cy="5334000"/>
+            <a:off x="762000" y="2286000"/>
+            <a:ext cx="8763000" cy="6096000"/>
           </a:xfrm>
           <a:prstGeom prst="rect">
             <a:avLst/>

--- a/atelier/atelier-s06-about-me.pptx
+++ b/atelier/atelier-s06-about-me.pptx
@@ -3316,7 +3316,7 @@
         </p:nvSpPr>
         <p:spPr>
           <a:xfrm>
-            <a:off x="762000" y="11754743"/>
+            <a:off x="762000" y="11859518"/>
             <a:ext cx="8763000" cy="9525"/>
           </a:xfrm>
           <a:prstGeom prst="rect">
@@ -3360,7 +3360,7 @@
         </p:nvSpPr>
         <p:spPr>
           <a:xfrm>
-            <a:off x="762000" y="12969180"/>
+            <a:off x="762000" y="13102530"/>
             <a:ext cx="8763000" cy="9525"/>
           </a:xfrm>
           <a:prstGeom prst="rect">
@@ -3404,7 +3404,7 @@
         </p:nvSpPr>
         <p:spPr>
           <a:xfrm>
-            <a:off x="762000" y="14183618"/>
+            <a:off x="762000" y="14345543"/>
             <a:ext cx="8763000" cy="9525"/>
           </a:xfrm>
           <a:prstGeom prst="rect">
@@ -3707,8 +3707,8 @@
         </p:nvSpPr>
         <p:spPr>
           <a:xfrm>
-            <a:off x="7782818" y="952500"/>
-            <a:ext cx="3168491" cy="171450"/>
+            <a:off x="7376220" y="933450"/>
+            <a:ext cx="3819049" cy="209550"/>
           </a:xfrm>
           <a:prstGeom prst="rect">
             <a:avLst/>
@@ -3721,7 +3721,7 @@
           <a:p>
             <a:pPr algn="l"/>
             <a:r>
-              <a:rPr sz="1125" i="0" b="0" spc="180">
+              <a:rPr sz="1425" i="0" b="0" spc="199">
                 <a:solidFill>
                   <a:srgbClr val="8A7E6F"/>
                 </a:solidFill>
@@ -3743,7 +3743,7 @@
         <p:spPr>
           <a:xfrm>
             <a:off x="762000" y="8801100"/>
-            <a:ext cx="14401800" cy="228600"/>
+            <a:ext cx="14401800" cy="247650"/>
           </a:xfrm>
           <a:prstGeom prst="rect">
             <a:avLst/>
@@ -3756,7 +3756,7 @@
           <a:p>
             <a:pPr algn="l"/>
             <a:r>
-              <a:rPr sz="1575" i="0" b="1" spc="472">
+              <a:rPr sz="1650" i="0" b="1" spc="495">
                 <a:solidFill>
                   <a:srgbClr val="BC5B36"/>
                 </a:solidFill>
@@ -3777,7 +3777,7 @@
         </p:nvSpPr>
         <p:spPr>
           <a:xfrm>
-            <a:off x="762000" y="9163050"/>
+            <a:off x="762000" y="9182100"/>
             <a:ext cx="14401800" cy="700980"/>
           </a:xfrm>
           <a:prstGeom prst="rect">
@@ -3816,8 +3816,8 @@
         </p:nvSpPr>
         <p:spPr>
           <a:xfrm>
-            <a:off x="762000" y="9997380"/>
-            <a:ext cx="14401800" cy="171450"/>
+            <a:off x="762000" y="10035480"/>
+            <a:ext cx="14401800" cy="209550"/>
           </a:xfrm>
           <a:prstGeom prst="rect">
             <a:avLst/>
@@ -3830,7 +3830,7 @@
           <a:p>
             <a:pPr algn="l"/>
             <a:r>
-              <a:rPr sz="1200" i="0" b="1" spc="240">
+              <a:rPr sz="1425" i="0" b="1" spc="256">
                 <a:solidFill>
                   <a:srgbClr val="8A7E6F"/>
                 </a:solidFill>
@@ -3851,8 +3851,8 @@
         </p:nvSpPr>
         <p:spPr>
           <a:xfrm>
-            <a:off x="762000" y="10797480"/>
-            <a:ext cx="960120" cy="398115"/>
+            <a:off x="762000" y="10873680"/>
+            <a:ext cx="990600" cy="419100"/>
           </a:xfrm>
           <a:prstGeom prst="rect">
             <a:avLst/>
@@ -3869,7 +3869,7 @@
               </a:lnSpc>
             </a:pPr>
             <a:r>
-              <a:rPr sz="2850" i="1" b="0">
+              <a:rPr sz="3000" i="1" b="0">
                 <a:solidFill>
                   <a:srgbClr val="BC5B36"/>
                 </a:solidFill>
@@ -3890,8 +3890,8 @@
         </p:nvSpPr>
         <p:spPr>
           <a:xfrm>
-            <a:off x="1295400" y="10797480"/>
-            <a:ext cx="4846320" cy="352425"/>
+            <a:off x="1314450" y="10873680"/>
+            <a:ext cx="4846320" cy="381000"/>
           </a:xfrm>
           <a:prstGeom prst="rect">
             <a:avLst/>
@@ -3904,7 +3904,7 @@
           <a:p>
             <a:pPr algn="l"/>
             <a:r>
-              <a:rPr sz="2400" i="0" b="1">
+              <a:rPr sz="2625" i="0" b="1">
                 <a:solidFill>
                   <a:srgbClr val="1A1714"/>
                 </a:solidFill>
@@ -3925,7 +3925,7 @@
         </p:nvSpPr>
         <p:spPr>
           <a:xfrm>
-            <a:off x="1295400" y="11207055"/>
+            <a:off x="1314450" y="11311830"/>
             <a:ext cx="4846320" cy="300038"/>
           </a:xfrm>
           <a:prstGeom prst="rect">
@@ -3964,8 +3964,8 @@
         </p:nvSpPr>
         <p:spPr>
           <a:xfrm>
-            <a:off x="762000" y="12011918"/>
-            <a:ext cx="960120" cy="398115"/>
+            <a:off x="762000" y="12116693"/>
+            <a:ext cx="990600" cy="419100"/>
           </a:xfrm>
           <a:prstGeom prst="rect">
             <a:avLst/>
@@ -3982,7 +3982,7 @@
               </a:lnSpc>
             </a:pPr>
             <a:r>
-              <a:rPr sz="2850" i="1" b="0">
+              <a:rPr sz="3000" i="1" b="0">
                 <a:solidFill>
                   <a:srgbClr val="BC5B36"/>
                 </a:solidFill>
@@ -4003,8 +4003,8 @@
         </p:nvSpPr>
         <p:spPr>
           <a:xfrm>
-            <a:off x="1295400" y="12011918"/>
-            <a:ext cx="4614862" cy="352425"/>
+            <a:off x="1314450" y="12116693"/>
+            <a:ext cx="4614862" cy="381000"/>
           </a:xfrm>
           <a:prstGeom prst="rect">
             <a:avLst/>
@@ -4017,7 +4017,7 @@
           <a:p>
             <a:pPr algn="l"/>
             <a:r>
-              <a:rPr sz="2400" i="0" b="1">
+              <a:rPr sz="2625" i="0" b="1">
                 <a:solidFill>
                   <a:srgbClr val="1A1714"/>
                 </a:solidFill>
@@ -4038,7 +4038,7 @@
         </p:nvSpPr>
         <p:spPr>
           <a:xfrm>
-            <a:off x="1295400" y="12421493"/>
+            <a:off x="1314450" y="12554843"/>
             <a:ext cx="4614862" cy="300038"/>
           </a:xfrm>
           <a:prstGeom prst="rect">
@@ -4077,8 +4077,8 @@
         </p:nvSpPr>
         <p:spPr>
           <a:xfrm>
-            <a:off x="762000" y="13226355"/>
-            <a:ext cx="960120" cy="398115"/>
+            <a:off x="762000" y="13359705"/>
+            <a:ext cx="990600" cy="419100"/>
           </a:xfrm>
           <a:prstGeom prst="rect">
             <a:avLst/>
@@ -4095,7 +4095,7 @@
               </a:lnSpc>
             </a:pPr>
             <a:r>
-              <a:rPr sz="2850" i="1" b="0">
+              <a:rPr sz="3000" i="1" b="0">
                 <a:solidFill>
                   <a:srgbClr val="BC5B36"/>
                 </a:solidFill>
@@ -4116,8 +4116,8 @@
         </p:nvSpPr>
         <p:spPr>
           <a:xfrm>
-            <a:off x="1295400" y="13226355"/>
-            <a:ext cx="5148501" cy="352425"/>
+            <a:off x="1314450" y="13359705"/>
+            <a:ext cx="5148501" cy="381000"/>
           </a:xfrm>
           <a:prstGeom prst="rect">
             <a:avLst/>
@@ -4130,7 +4130,7 @@
           <a:p>
             <a:pPr algn="l"/>
             <a:r>
-              <a:rPr sz="2400" i="0" b="1">
+              <a:rPr sz="2625" i="0" b="1">
                 <a:solidFill>
                   <a:srgbClr val="1A1714"/>
                 </a:solidFill>
@@ -4151,7 +4151,7 @@
         </p:nvSpPr>
         <p:spPr>
           <a:xfrm>
-            <a:off x="1295400" y="13635930"/>
+            <a:off x="1314450" y="13797855"/>
             <a:ext cx="5148501" cy="300038"/>
           </a:xfrm>
           <a:prstGeom prst="rect">
@@ -4190,8 +4190,8 @@
         </p:nvSpPr>
         <p:spPr>
           <a:xfrm>
-            <a:off x="1333500" y="16097250"/>
-            <a:ext cx="4411504" cy="257175"/>
+            <a:off x="1333500" y="16078200"/>
+            <a:ext cx="4989195" cy="295275"/>
           </a:xfrm>
           <a:prstGeom prst="rect">
             <a:avLst/>
@@ -4204,7 +4204,7 @@
           <a:p>
             <a:pPr algn="l"/>
             <a:r>
-              <a:rPr sz="1725" i="0" b="1" spc="172">
+              <a:rPr sz="2025" i="0" b="1" spc="162">
                 <a:solidFill>
                   <a:srgbClr val="1A1714"/>
                 </a:solidFill>
@@ -4260,8 +4260,8 @@
         </p:nvSpPr>
         <p:spPr>
           <a:xfrm>
-            <a:off x="1823799" y="17192625"/>
-            <a:ext cx="6639401" cy="180975"/>
+            <a:off x="1329690" y="17164050"/>
+            <a:ext cx="7627620" cy="209550"/>
           </a:xfrm>
           <a:prstGeom prst="rect">
             <a:avLst/>
@@ -4274,7 +4274,7 @@
           <a:p>
             <a:pPr algn="ctr"/>
             <a:r>
-              <a:rPr sz="1200" i="0" b="0" spc="240">
+              <a:rPr sz="1425" i="0" b="0" spc="256">
                 <a:solidFill>
                   <a:srgbClr val="8A7E6F"/>
                 </a:solidFill>
